--- a/templates/000_pm_suite/02_프로젝트 개발/04_설계/01_기획설계/프로젝트명_화면설계서_공통_V1.0_20230530.pptx
+++ b/templates/000_pm_suite/02_프로젝트 개발/04_설계/01_기획설계/프로젝트명_화면설계서_공통_V1.0_20230530.pptx
@@ -2542,7 +2542,7 @@
             </a:pPr>
             <a:r>
               <a:rPr lang="en-US" sz="800"/>
-              <a:t>프로젝트명</a:t>
+              <a:t>한빛글로벌 SyncGuard AI</a:t>
             </a:r>
             <a:r>
               <a:rPr lang="en-US" sz="800" b="0" i="0" u="none" strike="noStrike" cap="none">
@@ -3380,7 +3380,7 @@
             </a:pPr>
             <a:r>
               <a:rPr lang="en-US" sz="800"/>
-              <a:t>프로젝트명 </a:t>
+              <a:t>한빛글로벌 SyncGuard AI </a:t>
             </a:r>
             <a:r>
               <a:rPr lang="en-US" sz="800" b="0" i="0" u="none" strike="noStrike" cap="none">
@@ -4022,7 +4022,7 @@
             </a:pPr>
             <a:r>
               <a:rPr lang="en-US" sz="800"/>
-              <a:t>프로젝트명</a:t>
+              <a:t>한빛글로벌 SyncGuard AI</a:t>
             </a:r>
             <a:r>
               <a:rPr lang="en-US" sz="800" b="0" i="0" u="none" strike="noStrike" cap="none">
@@ -4860,7 +4860,7 @@
             </a:pPr>
             <a:r>
               <a:rPr lang="en-US" sz="800"/>
-              <a:t>프로젝트명</a:t>
+              <a:t>한빛글로벌 SyncGuard AI</a:t>
             </a:r>
             <a:r>
               <a:rPr lang="en-US" sz="800" b="0" i="0" u="none" strike="noStrike" cap="none">
@@ -5758,7 +5758,7 @@
             </a:pPr>
             <a:r>
               <a:rPr lang="en-US" sz="800"/>
-              <a:t>프로젝트명</a:t>
+              <a:t>한빛글로벌 SyncGuard AI</a:t>
             </a:r>
             <a:r>
               <a:rPr lang="en-US" sz="800" b="0" i="0" u="none" strike="noStrike" cap="none">
@@ -7994,7 +7994,7 @@
             </a:pPr>
             <a:r>
               <a:rPr lang="en-US"/>
-              <a:t>프로젝트명</a:t>
+              <a:t>한빛글로벌 SyncGuard AI</a:t>
             </a:r>
             <a:endParaRPr/>
           </a:p>
@@ -9860,7 +9860,7 @@
                           <a:cs typeface="Arial"/>
                           <a:sym typeface="Arial"/>
                         </a:rPr>
-                        <a:t>2021.09.13</a:t>
+                        <a:t>2026.06.15</a:t>
                       </a:r>
                       <a:endParaRPr/>
                     </a:p>

--- a/templates/000_pm_suite/02_프로젝트 개발/04_설계/01_기획설계/프로젝트명_화면설계서_공통_V1.0_20230530.pptx
+++ b/templates/000_pm_suite/02_프로젝트 개발/04_설계/01_기획설계/프로젝트명_화면설계서_공통_V1.0_20230530.pptx
@@ -2542,7 +2542,7 @@
             </a:pPr>
             <a:r>
               <a:rPr lang="en-US" sz="800"/>
-              <a:t>한빛글로벌 SyncGuard AI</a:t>
+              <a:t>한빛글로벌 SyncFlow AI</a:t>
             </a:r>
             <a:r>
               <a:rPr lang="en-US" sz="800" b="0" i="0" u="none" strike="noStrike" cap="none">
@@ -3380,7 +3380,7 @@
             </a:pPr>
             <a:r>
               <a:rPr lang="en-US" sz="800"/>
-              <a:t>한빛글로벌 SyncGuard AI </a:t>
+              <a:t>한빛글로벌 SyncFlow AI </a:t>
             </a:r>
             <a:r>
               <a:rPr lang="en-US" sz="800" b="0" i="0" u="none" strike="noStrike" cap="none">
@@ -4022,7 +4022,7 @@
             </a:pPr>
             <a:r>
               <a:rPr lang="en-US" sz="800"/>
-              <a:t>한빛글로벌 SyncGuard AI</a:t>
+              <a:t>한빛글로벌 SyncFlow AI</a:t>
             </a:r>
             <a:r>
               <a:rPr lang="en-US" sz="800" b="0" i="0" u="none" strike="noStrike" cap="none">
@@ -4860,7 +4860,7 @@
             </a:pPr>
             <a:r>
               <a:rPr lang="en-US" sz="800"/>
-              <a:t>한빛글로벌 SyncGuard AI</a:t>
+              <a:t>한빛글로벌 SyncFlow AI</a:t>
             </a:r>
             <a:r>
               <a:rPr lang="en-US" sz="800" b="0" i="0" u="none" strike="noStrike" cap="none">
@@ -5758,7 +5758,7 @@
             </a:pPr>
             <a:r>
               <a:rPr lang="en-US" sz="800"/>
-              <a:t>한빛글로벌 SyncGuard AI</a:t>
+              <a:t>한빛글로벌 SyncFlow AI</a:t>
             </a:r>
             <a:r>
               <a:rPr lang="en-US" sz="800" b="0" i="0" u="none" strike="noStrike" cap="none">
@@ -7994,7 +7994,7 @@
             </a:pPr>
             <a:r>
               <a:rPr lang="en-US"/>
-              <a:t>한빛글로벌 SyncGuard AI</a:t>
+              <a:t>한빛글로벌 SyncFlow AI</a:t>
             </a:r>
             <a:endParaRPr/>
           </a:p>
@@ -27733,7 +27733,7 @@
                           <a:cs typeface="Arial"/>
                           <a:sym typeface="Arial"/>
                         </a:rPr>
-                        <a:t>프로모션</a:t>
+                        <a:t>양산발주</a:t>
                       </a:r>
                       <a:endParaRPr sz="900" u="none" strike="noStrike" cap="none">
                         <a:solidFill>
